--- a/BugBoard_Presentation.pptx
+++ b/BugBoard_Presentation.pptx
@@ -5388,7 +5388,7 @@
         <p:spPr>
           <a:xfrm>
             <a:off x="914400" y="1828800"/>
-            <a:ext cx="4754880" cy="822960"/>
+            <a:ext cx="4754880" cy="731520"/>
           </a:xfrm>
           <a:prstGeom prst="rect">
             <a:avLst/>
@@ -5442,7 +5442,7 @@
         </p:blipFill>
         <p:spPr>
           <a:xfrm>
-            <a:off x="914400" y="2651760"/>
+            <a:off x="914400" y="2606040"/>
             <a:ext cx="4754880" cy="965200"/>
           </a:xfrm>
           <a:prstGeom prst="rect">
@@ -5504,7 +5504,7 @@
         <p:spPr>
           <a:xfrm>
             <a:off x="6400800" y="1828800"/>
-            <a:ext cx="4846320" cy="822960"/>
+            <a:ext cx="4846320" cy="731520"/>
           </a:xfrm>
           <a:prstGeom prst="rect">
             <a:avLst/>
@@ -5544,7 +5544,7 @@
       </p:sp>
       <p:pic>
         <p:nvPicPr>
-          <p:cNvPr id="10" name="Picture 9" descr="image-7.png"/>
+          <p:cNvPr id="10" name="Picture 9" descr="image-38.png"/>
           <p:cNvPicPr>
             <a:picLocks noChangeAspect="1"/>
           </p:cNvPicPr>
@@ -5558,8 +5558,8 @@
         </p:blipFill>
         <p:spPr>
           <a:xfrm>
-            <a:off x="6400800" y="2651760"/>
-            <a:ext cx="4846320" cy="2296967"/>
+            <a:off x="6400800" y="2606040"/>
+            <a:ext cx="4846320" cy="2844373"/>
           </a:xfrm>
           <a:prstGeom prst="rect">
             <a:avLst/>
@@ -5772,7 +5772,7 @@
         <p:spPr>
           <a:xfrm>
             <a:off x="914400" y="1828800"/>
-            <a:ext cx="4754880" cy="822960"/>
+            <a:ext cx="4754880" cy="731520"/>
           </a:xfrm>
           <a:prstGeom prst="rect">
             <a:avLst/>
@@ -5826,7 +5826,7 @@
         </p:blipFill>
         <p:spPr>
           <a:xfrm>
-            <a:off x="914400" y="2651760"/>
+            <a:off x="914400" y="2606040"/>
             <a:ext cx="4754880" cy="3426248"/>
           </a:xfrm>
           <a:prstGeom prst="rect">
@@ -5888,7 +5888,7 @@
         <p:spPr>
           <a:xfrm>
             <a:off x="6400800" y="1828800"/>
-            <a:ext cx="4846320" cy="822960"/>
+            <a:ext cx="4846320" cy="731520"/>
           </a:xfrm>
           <a:prstGeom prst="rect">
             <a:avLst/>
@@ -5942,7 +5942,7 @@
         </p:blipFill>
         <p:spPr>
           <a:xfrm>
-            <a:off x="6400800" y="2651760"/>
+            <a:off x="6400800" y="2606040"/>
             <a:ext cx="4846320" cy="279066"/>
           </a:xfrm>
           <a:prstGeom prst="rect">
